--- a/wood_log_splitter.pptx
+++ b/wood_log_splitter.pptx
@@ -6,6 +6,7 @@
   </p:sldMasterIdLst>
   <p:sldIdLst>
     <p:sldId id="261" r:id="rId2"/>
+    <p:sldId id="262" r:id="rId3"/>
   </p:sldIdLst>
   <p:sldSz cx="12192000" cy="6858000"/>
   <p:notesSz cx="6858000" cy="9144000"/>
@@ -258,7 +259,7 @@
           <a:lstStyle/>
           <a:p>
             <a:fld id="{5F491023-0B0A-7041-9F06-D25A50EF063B}" type="datetimeFigureOut">
-              <a:t>10/16/22</a:t>
+              <a:t>10/23/22</a:t>
             </a:fld>
             <a:endParaRPr lang="en-US"/>
           </a:p>
@@ -454,7 +455,7 @@
           <a:lstStyle/>
           <a:p>
             <a:fld id="{5F491023-0B0A-7041-9F06-D25A50EF063B}" type="datetimeFigureOut">
-              <a:t>10/16/22</a:t>
+              <a:t>10/23/22</a:t>
             </a:fld>
             <a:endParaRPr lang="en-US"/>
           </a:p>
@@ -660,7 +661,7 @@
           <a:lstStyle/>
           <a:p>
             <a:fld id="{5F491023-0B0A-7041-9F06-D25A50EF063B}" type="datetimeFigureOut">
-              <a:t>10/16/22</a:t>
+              <a:t>10/23/22</a:t>
             </a:fld>
             <a:endParaRPr lang="en-US"/>
           </a:p>
@@ -856,7 +857,7 @@
           <a:lstStyle/>
           <a:p>
             <a:fld id="{5F491023-0B0A-7041-9F06-D25A50EF063B}" type="datetimeFigureOut">
-              <a:t>10/16/22</a:t>
+              <a:t>10/23/22</a:t>
             </a:fld>
             <a:endParaRPr lang="en-US"/>
           </a:p>
@@ -1129,7 +1130,7 @@
           <a:lstStyle/>
           <a:p>
             <a:fld id="{5F491023-0B0A-7041-9F06-D25A50EF063B}" type="datetimeFigureOut">
-              <a:t>10/16/22</a:t>
+              <a:t>10/23/22</a:t>
             </a:fld>
             <a:endParaRPr lang="en-US"/>
           </a:p>
@@ -1392,7 +1393,7 @@
           <a:lstStyle/>
           <a:p>
             <a:fld id="{5F491023-0B0A-7041-9F06-D25A50EF063B}" type="datetimeFigureOut">
-              <a:t>10/16/22</a:t>
+              <a:t>10/23/22</a:t>
             </a:fld>
             <a:endParaRPr lang="en-US"/>
           </a:p>
@@ -1802,7 +1803,7 @@
           <a:lstStyle/>
           <a:p>
             <a:fld id="{5F491023-0B0A-7041-9F06-D25A50EF063B}" type="datetimeFigureOut">
-              <a:t>10/16/22</a:t>
+              <a:t>10/23/22</a:t>
             </a:fld>
             <a:endParaRPr lang="en-US"/>
           </a:p>
@@ -1941,7 +1942,7 @@
           <a:lstStyle/>
           <a:p>
             <a:fld id="{5F491023-0B0A-7041-9F06-D25A50EF063B}" type="datetimeFigureOut">
-              <a:t>10/16/22</a:t>
+              <a:t>10/23/22</a:t>
             </a:fld>
             <a:endParaRPr lang="en-US"/>
           </a:p>
@@ -2052,7 +2053,7 @@
           <a:lstStyle/>
           <a:p>
             <a:fld id="{5F491023-0B0A-7041-9F06-D25A50EF063B}" type="datetimeFigureOut">
-              <a:t>10/16/22</a:t>
+              <a:t>10/23/22</a:t>
             </a:fld>
             <a:endParaRPr lang="en-US"/>
           </a:p>
@@ -2361,7 +2362,7 @@
           <a:lstStyle/>
           <a:p>
             <a:fld id="{5F491023-0B0A-7041-9F06-D25A50EF063B}" type="datetimeFigureOut">
-              <a:t>10/16/22</a:t>
+              <a:t>10/23/22</a:t>
             </a:fld>
             <a:endParaRPr lang="en-US"/>
           </a:p>
@@ -2647,7 +2648,7 @@
           <a:lstStyle/>
           <a:p>
             <a:fld id="{5F491023-0B0A-7041-9F06-D25A50EF063B}" type="datetimeFigureOut">
-              <a:t>10/16/22</a:t>
+              <a:t>10/23/22</a:t>
             </a:fld>
             <a:endParaRPr lang="en-US"/>
           </a:p>
@@ -2886,7 +2887,7 @@
           </a:lstStyle>
           <a:p>
             <a:fld id="{5F491023-0B0A-7041-9F06-D25A50EF063B}" type="datetimeFigureOut">
-              <a:t>10/16/22</a:t>
+              <a:t>10/23/22</a:t>
             </a:fld>
             <a:endParaRPr lang="en-US"/>
           </a:p>
@@ -3669,6 +3670,342 @@
 </p:sld>
 </file>
 
+<file path=ppt/slides/slide2.xml><?xml version="1.0" encoding="utf-8"?>
+<p:sld xmlns:a="http://schemas.openxmlformats.org/drawingml/2006/main" xmlns:r="http://schemas.openxmlformats.org/officeDocument/2006/relationships" xmlns:p="http://schemas.openxmlformats.org/presentationml/2006/main">
+  <p:cSld>
+    <p:spTree>
+      <p:nvGrpSpPr>
+        <p:cNvPr id="1" name=""/>
+        <p:cNvGrpSpPr/>
+        <p:nvPr/>
+      </p:nvGrpSpPr>
+      <p:grpSpPr>
+        <a:xfrm>
+          <a:off x="0" y="0"/>
+          <a:ext cx="0" cy="0"/>
+          <a:chOff x="0" y="0"/>
+          <a:chExt cx="0" cy="0"/>
+        </a:xfrm>
+      </p:grpSpPr>
+      <p:pic>
+        <p:nvPicPr>
+          <p:cNvPr id="2" name="Picture 1">
+            <a:extLst>
+              <a:ext uri="{FF2B5EF4-FFF2-40B4-BE49-F238E27FC236}">
+                <a16:creationId xmlns:a16="http://schemas.microsoft.com/office/drawing/2014/main" id="{906B216E-B8F9-F30A-8A29-4C0F002BE577}"/>
+              </a:ext>
+            </a:extLst>
+          </p:cNvPr>
+          <p:cNvPicPr>
+            <a:picLocks noChangeAspect="1"/>
+          </p:cNvPicPr>
+          <p:nvPr/>
+        </p:nvPicPr>
+        <p:blipFill>
+          <a:blip r:embed="rId2" cstate="email">
+            <a:extLst>
+              <a:ext uri="{28A0092B-C50C-407E-A947-70E740481C1C}">
+                <a14:useLocalDpi xmlns:a14="http://schemas.microsoft.com/office/drawing/2010/main"/>
+              </a:ext>
+            </a:extLst>
+          </a:blip>
+          <a:stretch>
+            <a:fillRect/>
+          </a:stretch>
+        </p:blipFill>
+        <p:spPr>
+          <a:xfrm>
+            <a:off x="5882989" y="1586208"/>
+            <a:ext cx="2863026" cy="1582645"/>
+          </a:xfrm>
+          <a:prstGeom prst="rect">
+            <a:avLst/>
+          </a:prstGeom>
+        </p:spPr>
+      </p:pic>
+      <p:pic>
+        <p:nvPicPr>
+          <p:cNvPr id="3" name="Picture 2">
+            <a:extLst>
+              <a:ext uri="{FF2B5EF4-FFF2-40B4-BE49-F238E27FC236}">
+                <a16:creationId xmlns:a16="http://schemas.microsoft.com/office/drawing/2014/main" id="{80102615-A460-0BC4-4287-C603ED763DB5}"/>
+              </a:ext>
+            </a:extLst>
+          </p:cNvPr>
+          <p:cNvPicPr>
+            <a:picLocks noChangeAspect="1"/>
+          </p:cNvPicPr>
+          <p:nvPr/>
+        </p:nvPicPr>
+        <p:blipFill>
+          <a:blip r:embed="rId3" cstate="email">
+            <a:extLst>
+              <a:ext uri="{28A0092B-C50C-407E-A947-70E740481C1C}">
+                <a14:useLocalDpi xmlns:a14="http://schemas.microsoft.com/office/drawing/2010/main"/>
+              </a:ext>
+            </a:extLst>
+          </a:blip>
+          <a:stretch>
+            <a:fillRect/>
+          </a:stretch>
+        </p:blipFill>
+        <p:spPr>
+          <a:xfrm>
+            <a:off x="5882989" y="3288424"/>
+            <a:ext cx="2863026" cy="1582645"/>
+          </a:xfrm>
+          <a:prstGeom prst="rect">
+            <a:avLst/>
+          </a:prstGeom>
+        </p:spPr>
+      </p:pic>
+      <p:pic>
+        <p:nvPicPr>
+          <p:cNvPr id="4" name="Picture 3">
+            <a:extLst>
+              <a:ext uri="{FF2B5EF4-FFF2-40B4-BE49-F238E27FC236}">
+                <a16:creationId xmlns:a16="http://schemas.microsoft.com/office/drawing/2014/main" id="{AA94D19A-D407-723E-628A-E25561D60A15}"/>
+              </a:ext>
+            </a:extLst>
+          </p:cNvPr>
+          <p:cNvPicPr>
+            <a:picLocks noChangeAspect="1"/>
+          </p:cNvPicPr>
+          <p:nvPr/>
+        </p:nvPicPr>
+        <p:blipFill>
+          <a:blip r:embed="rId4" cstate="email">
+            <a:extLst>
+              <a:ext uri="{28A0092B-C50C-407E-A947-70E740481C1C}">
+                <a14:useLocalDpi xmlns:a14="http://schemas.microsoft.com/office/drawing/2010/main"/>
+              </a:ext>
+            </a:extLst>
+          </a:blip>
+          <a:stretch>
+            <a:fillRect/>
+          </a:stretch>
+        </p:blipFill>
+        <p:spPr>
+          <a:xfrm>
+            <a:off x="5882989" y="4990640"/>
+            <a:ext cx="2863026" cy="1582645"/>
+          </a:xfrm>
+          <a:prstGeom prst="rect">
+            <a:avLst/>
+          </a:prstGeom>
+        </p:spPr>
+      </p:pic>
+      <p:pic>
+        <p:nvPicPr>
+          <p:cNvPr id="5" name="Picture 4">
+            <a:extLst>
+              <a:ext uri="{FF2B5EF4-FFF2-40B4-BE49-F238E27FC236}">
+                <a16:creationId xmlns:a16="http://schemas.microsoft.com/office/drawing/2014/main" id="{E67BBA98-E811-6867-2AD4-299F38A33399}"/>
+              </a:ext>
+            </a:extLst>
+          </p:cNvPr>
+          <p:cNvPicPr>
+            <a:picLocks noChangeAspect="1"/>
+          </p:cNvPicPr>
+          <p:nvPr/>
+        </p:nvPicPr>
+        <p:blipFill>
+          <a:blip r:embed="rId5" cstate="email">
+            <a:extLst>
+              <a:ext uri="{28A0092B-C50C-407E-A947-70E740481C1C}">
+                <a14:useLocalDpi xmlns:a14="http://schemas.microsoft.com/office/drawing/2010/main"/>
+              </a:ext>
+            </a:extLst>
+          </a:blip>
+          <a:stretch>
+            <a:fillRect/>
+          </a:stretch>
+        </p:blipFill>
+        <p:spPr>
+          <a:xfrm>
+            <a:off x="8967711" y="1586210"/>
+            <a:ext cx="2863025" cy="1582645"/>
+          </a:xfrm>
+          <a:prstGeom prst="rect">
+            <a:avLst/>
+          </a:prstGeom>
+        </p:spPr>
+      </p:pic>
+      <p:pic>
+        <p:nvPicPr>
+          <p:cNvPr id="6" name="Picture 5">
+            <a:extLst>
+              <a:ext uri="{FF2B5EF4-FFF2-40B4-BE49-F238E27FC236}">
+                <a16:creationId xmlns:a16="http://schemas.microsoft.com/office/drawing/2014/main" id="{AF8DD1CE-2A86-10BC-C3D2-76C58F1218A2}"/>
+              </a:ext>
+            </a:extLst>
+          </p:cNvPr>
+          <p:cNvPicPr>
+            <a:picLocks noChangeAspect="1"/>
+          </p:cNvPicPr>
+          <p:nvPr/>
+        </p:nvPicPr>
+        <p:blipFill>
+          <a:blip r:embed="rId6" cstate="email">
+            <a:extLst>
+              <a:ext uri="{28A0092B-C50C-407E-A947-70E740481C1C}">
+                <a14:useLocalDpi xmlns:a14="http://schemas.microsoft.com/office/drawing/2010/main"/>
+              </a:ext>
+            </a:extLst>
+          </a:blip>
+          <a:stretch>
+            <a:fillRect/>
+          </a:stretch>
+        </p:blipFill>
+        <p:spPr>
+          <a:xfrm>
+            <a:off x="8967711" y="3288425"/>
+            <a:ext cx="2863026" cy="1582645"/>
+          </a:xfrm>
+          <a:prstGeom prst="rect">
+            <a:avLst/>
+          </a:prstGeom>
+        </p:spPr>
+      </p:pic>
+      <p:pic>
+        <p:nvPicPr>
+          <p:cNvPr id="7" name="Picture 6">
+            <a:extLst>
+              <a:ext uri="{FF2B5EF4-FFF2-40B4-BE49-F238E27FC236}">
+                <a16:creationId xmlns:a16="http://schemas.microsoft.com/office/drawing/2014/main" id="{942C22DD-13F2-5100-7C61-ECE710858B84}"/>
+              </a:ext>
+            </a:extLst>
+          </p:cNvPr>
+          <p:cNvPicPr>
+            <a:picLocks noChangeAspect="1"/>
+          </p:cNvPicPr>
+          <p:nvPr/>
+        </p:nvPicPr>
+        <p:blipFill>
+          <a:blip r:embed="rId7" cstate="email">
+            <a:extLst>
+              <a:ext uri="{28A0092B-C50C-407E-A947-70E740481C1C}">
+                <a14:useLocalDpi xmlns:a14="http://schemas.microsoft.com/office/drawing/2010/main"/>
+              </a:ext>
+            </a:extLst>
+          </a:blip>
+          <a:stretch>
+            <a:fillRect/>
+          </a:stretch>
+        </p:blipFill>
+        <p:spPr>
+          <a:xfrm>
+            <a:off x="8967713" y="4990640"/>
+            <a:ext cx="2863025" cy="1582645"/>
+          </a:xfrm>
+          <a:prstGeom prst="rect">
+            <a:avLst/>
+          </a:prstGeom>
+        </p:spPr>
+      </p:pic>
+      <p:sp>
+        <p:nvSpPr>
+          <p:cNvPr id="8" name="TextBox 7">
+            <a:extLst>
+              <a:ext uri="{FF2B5EF4-FFF2-40B4-BE49-F238E27FC236}">
+                <a16:creationId xmlns:a16="http://schemas.microsoft.com/office/drawing/2014/main" id="{01D141E4-E613-1381-3F34-350329F8B271}"/>
+              </a:ext>
+            </a:extLst>
+          </p:cNvPr>
+          <p:cNvSpPr txBox="1"/>
+          <p:nvPr/>
+        </p:nvSpPr>
+        <p:spPr>
+          <a:xfrm>
+            <a:off x="220336" y="1564395"/>
+            <a:ext cx="4362679" cy="523220"/>
+          </a:xfrm>
+          <a:prstGeom prst="rect">
+            <a:avLst/>
+          </a:prstGeom>
+          <a:noFill/>
+        </p:spPr>
+        <p:txBody>
+          <a:bodyPr wrap="square" rtlCol="0">
+            <a:spAutoFit/>
+          </a:bodyPr>
+          <a:lstStyle/>
+          <a:p>
+            <a:pPr marL="285750" indent="-285750">
+              <a:buFont typeface="Arial" panose="020B0604020202020204" pitchFamily="34" charset="0"/>
+              <a:buChar char="•"/>
+            </a:pPr>
+            <a:r>
+              <a:rPr lang="en-US" sz="1400">
+                <a:hlinkClick r:id="rId8"/>
+              </a:rPr>
+              <a:t>https://www.youtube.com/watch?v=7txUWFFHkBc</a:t>
+            </a:r>
+            <a:endParaRPr lang="en-US" sz="1400"/>
+          </a:p>
+          <a:p>
+            <a:pPr marL="285750" indent="-285750">
+              <a:buFont typeface="Arial" panose="020B0604020202020204" pitchFamily="34" charset="0"/>
+              <a:buChar char="•"/>
+            </a:pPr>
+            <a:r>
+              <a:rPr lang="en-US" sz="1400">
+                <a:hlinkClick r:id="rId9"/>
+              </a:rPr>
+              <a:t>https://www.youtube.com/watch?v=wd_E9VhSfSg</a:t>
+            </a:r>
+            <a:endParaRPr lang="en-US" sz="1400"/>
+          </a:p>
+        </p:txBody>
+      </p:sp>
+      <p:sp>
+        <p:nvSpPr>
+          <p:cNvPr id="9" name="TextBox 8">
+            <a:extLst>
+              <a:ext uri="{FF2B5EF4-FFF2-40B4-BE49-F238E27FC236}">
+                <a16:creationId xmlns:a16="http://schemas.microsoft.com/office/drawing/2014/main" id="{5BADFF37-24A8-B407-EE91-AD135CDC10D8}"/>
+              </a:ext>
+            </a:extLst>
+          </p:cNvPr>
+          <p:cNvSpPr txBox="1"/>
+          <p:nvPr/>
+        </p:nvSpPr>
+        <p:spPr>
+          <a:xfrm>
+            <a:off x="-1" y="0"/>
+            <a:ext cx="4583017" cy="523220"/>
+          </a:xfrm>
+          <a:prstGeom prst="rect">
+            <a:avLst/>
+          </a:prstGeom>
+          <a:noFill/>
+        </p:spPr>
+        <p:txBody>
+          <a:bodyPr wrap="square" rtlCol="0">
+            <a:spAutoFit/>
+          </a:bodyPr>
+          <a:lstStyle/>
+          <a:p>
+            <a:r>
+              <a:rPr lang="en-US" sz="2800" b="1"/>
+              <a:t>Maunual Firewood Splitter</a:t>
+            </a:r>
+          </a:p>
+        </p:txBody>
+      </p:sp>
+    </p:spTree>
+    <p:extLst>
+      <p:ext uri="{BB962C8B-B14F-4D97-AF65-F5344CB8AC3E}">
+        <p14:creationId xmlns:p14="http://schemas.microsoft.com/office/powerpoint/2010/main" val="1817094962"/>
+      </p:ext>
+    </p:extLst>
+  </p:cSld>
+  <p:clrMapOvr>
+    <a:masterClrMapping/>
+  </p:clrMapOvr>
+</p:sld>
+</file>
+
 <file path=ppt/theme/theme1.xml><?xml version="1.0" encoding="utf-8"?>
 <a:theme xmlns:a="http://schemas.openxmlformats.org/drawingml/2006/main" name="Office Theme">
   <a:themeElements>

--- a/wood_log_splitter.pptx
+++ b/wood_log_splitter.pptx
@@ -7,6 +7,7 @@
   <p:sldIdLst>
     <p:sldId id="261" r:id="rId2"/>
     <p:sldId id="262" r:id="rId3"/>
+    <p:sldId id="263" r:id="rId4"/>
   </p:sldIdLst>
   <p:sldSz cx="12192000" cy="6858000"/>
   <p:notesSz cx="6858000" cy="9144000"/>
@@ -259,7 +260,7 @@
           <a:lstStyle/>
           <a:p>
             <a:fld id="{5F491023-0B0A-7041-9F06-D25A50EF063B}" type="datetimeFigureOut">
-              <a:t>10/23/22</a:t>
+              <a:t>11/26/22</a:t>
             </a:fld>
             <a:endParaRPr lang="en-US"/>
           </a:p>
@@ -455,7 +456,7 @@
           <a:lstStyle/>
           <a:p>
             <a:fld id="{5F491023-0B0A-7041-9F06-D25A50EF063B}" type="datetimeFigureOut">
-              <a:t>10/23/22</a:t>
+              <a:t>11/26/22</a:t>
             </a:fld>
             <a:endParaRPr lang="en-US"/>
           </a:p>
@@ -661,7 +662,7 @@
           <a:lstStyle/>
           <a:p>
             <a:fld id="{5F491023-0B0A-7041-9F06-D25A50EF063B}" type="datetimeFigureOut">
-              <a:t>10/23/22</a:t>
+              <a:t>11/26/22</a:t>
             </a:fld>
             <a:endParaRPr lang="en-US"/>
           </a:p>
@@ -857,7 +858,7 @@
           <a:lstStyle/>
           <a:p>
             <a:fld id="{5F491023-0B0A-7041-9F06-D25A50EF063B}" type="datetimeFigureOut">
-              <a:t>10/23/22</a:t>
+              <a:t>11/26/22</a:t>
             </a:fld>
             <a:endParaRPr lang="en-US"/>
           </a:p>
@@ -1130,7 +1131,7 @@
           <a:lstStyle/>
           <a:p>
             <a:fld id="{5F491023-0B0A-7041-9F06-D25A50EF063B}" type="datetimeFigureOut">
-              <a:t>10/23/22</a:t>
+              <a:t>11/26/22</a:t>
             </a:fld>
             <a:endParaRPr lang="en-US"/>
           </a:p>
@@ -1393,7 +1394,7 @@
           <a:lstStyle/>
           <a:p>
             <a:fld id="{5F491023-0B0A-7041-9F06-D25A50EF063B}" type="datetimeFigureOut">
-              <a:t>10/23/22</a:t>
+              <a:t>11/26/22</a:t>
             </a:fld>
             <a:endParaRPr lang="en-US"/>
           </a:p>
@@ -1803,7 +1804,7 @@
           <a:lstStyle/>
           <a:p>
             <a:fld id="{5F491023-0B0A-7041-9F06-D25A50EF063B}" type="datetimeFigureOut">
-              <a:t>10/23/22</a:t>
+              <a:t>11/26/22</a:t>
             </a:fld>
             <a:endParaRPr lang="en-US"/>
           </a:p>
@@ -1942,7 +1943,7 @@
           <a:lstStyle/>
           <a:p>
             <a:fld id="{5F491023-0B0A-7041-9F06-D25A50EF063B}" type="datetimeFigureOut">
-              <a:t>10/23/22</a:t>
+              <a:t>11/26/22</a:t>
             </a:fld>
             <a:endParaRPr lang="en-US"/>
           </a:p>
@@ -2053,7 +2054,7 @@
           <a:lstStyle/>
           <a:p>
             <a:fld id="{5F491023-0B0A-7041-9F06-D25A50EF063B}" type="datetimeFigureOut">
-              <a:t>10/23/22</a:t>
+              <a:t>11/26/22</a:t>
             </a:fld>
             <a:endParaRPr lang="en-US"/>
           </a:p>
@@ -2362,7 +2363,7 @@
           <a:lstStyle/>
           <a:p>
             <a:fld id="{5F491023-0B0A-7041-9F06-D25A50EF063B}" type="datetimeFigureOut">
-              <a:t>10/23/22</a:t>
+              <a:t>11/26/22</a:t>
             </a:fld>
             <a:endParaRPr lang="en-US"/>
           </a:p>
@@ -2648,7 +2649,7 @@
           <a:lstStyle/>
           <a:p>
             <a:fld id="{5F491023-0B0A-7041-9F06-D25A50EF063B}" type="datetimeFigureOut">
-              <a:t>10/23/22</a:t>
+              <a:t>11/26/22</a:t>
             </a:fld>
             <a:endParaRPr lang="en-US"/>
           </a:p>
@@ -2887,7 +2888,7 @@
           </a:lstStyle>
           <a:p>
             <a:fld id="{5F491023-0B0A-7041-9F06-D25A50EF063B}" type="datetimeFigureOut">
-              <a:t>10/23/22</a:t>
+              <a:t>11/26/22</a:t>
             </a:fld>
             <a:endParaRPr lang="en-US"/>
           </a:p>
@@ -4006,6 +4007,492 @@
 </p:sld>
 </file>
 
+<file path=ppt/slides/slide3.xml><?xml version="1.0" encoding="utf-8"?>
+<p:sld xmlns:a="http://schemas.openxmlformats.org/drawingml/2006/main" xmlns:r="http://schemas.openxmlformats.org/officeDocument/2006/relationships" xmlns:p="http://schemas.openxmlformats.org/presentationml/2006/main">
+  <p:cSld>
+    <p:spTree>
+      <p:nvGrpSpPr>
+        <p:cNvPr id="1" name=""/>
+        <p:cNvGrpSpPr/>
+        <p:nvPr/>
+      </p:nvGrpSpPr>
+      <p:grpSpPr>
+        <a:xfrm>
+          <a:off x="0" y="0"/>
+          <a:ext cx="0" cy="0"/>
+          <a:chOff x="0" y="0"/>
+          <a:chExt cx="0" cy="0"/>
+        </a:xfrm>
+      </p:grpSpPr>
+      <p:sp>
+        <p:nvSpPr>
+          <p:cNvPr id="3" name="TextBox 2">
+            <a:extLst>
+              <a:ext uri="{FF2B5EF4-FFF2-40B4-BE49-F238E27FC236}">
+                <a16:creationId xmlns:a16="http://schemas.microsoft.com/office/drawing/2014/main" id="{AB64F2AC-692E-D7E6-CA93-F90AA607E2E4}"/>
+              </a:ext>
+            </a:extLst>
+          </p:cNvPr>
+          <p:cNvSpPr txBox="1"/>
+          <p:nvPr/>
+        </p:nvSpPr>
+        <p:spPr>
+          <a:xfrm>
+            <a:off x="0" y="886094"/>
+            <a:ext cx="6096000" cy="369332"/>
+          </a:xfrm>
+          <a:prstGeom prst="rect">
+            <a:avLst/>
+          </a:prstGeom>
+          <a:noFill/>
+        </p:spPr>
+        <p:txBody>
+          <a:bodyPr wrap="square">
+            <a:spAutoFit/>
+          </a:bodyPr>
+          <a:lstStyle/>
+          <a:p>
+            <a:r>
+              <a:rPr lang="en-US" dirty="0"/>
+              <a:t>https://</a:t>
+            </a:r>
+            <a:r>
+              <a:rPr lang="en-US" dirty="0" err="1"/>
+              <a:t>www.youtube.com</a:t>
+            </a:r>
+            <a:r>
+              <a:rPr lang="en-US" dirty="0"/>
+              <a:t>/</a:t>
+            </a:r>
+            <a:r>
+              <a:rPr lang="en-US" dirty="0" err="1"/>
+              <a:t>watch?v</a:t>
+            </a:r>
+            <a:r>
+              <a:rPr lang="en-US" dirty="0"/>
+              <a:t>=</a:t>
+            </a:r>
+            <a:r>
+              <a:rPr lang="en-US" dirty="0" err="1"/>
+              <a:t>hlAerawLdYU</a:t>
+            </a:r>
+            <a:endParaRPr lang="en-US" dirty="0"/>
+          </a:p>
+        </p:txBody>
+      </p:sp>
+      <p:pic>
+        <p:nvPicPr>
+          <p:cNvPr id="4" name="Picture 3">
+            <a:extLst>
+              <a:ext uri="{FF2B5EF4-FFF2-40B4-BE49-F238E27FC236}">
+                <a16:creationId xmlns:a16="http://schemas.microsoft.com/office/drawing/2014/main" id="{3A366788-5B6E-8575-F977-ABF5D08C8DE8}"/>
+              </a:ext>
+            </a:extLst>
+          </p:cNvPr>
+          <p:cNvPicPr>
+            <a:picLocks noChangeAspect="1"/>
+          </p:cNvPicPr>
+          <p:nvPr/>
+        </p:nvPicPr>
+        <p:blipFill>
+          <a:blip r:embed="rId2" cstate="email">
+            <a:extLst>
+              <a:ext uri="{28A0092B-C50C-407E-A947-70E740481C1C}">
+                <a14:useLocalDpi xmlns:a14="http://schemas.microsoft.com/office/drawing/2010/main"/>
+              </a:ext>
+            </a:extLst>
+          </a:blip>
+          <a:stretch>
+            <a:fillRect/>
+          </a:stretch>
+        </p:blipFill>
+        <p:spPr>
+          <a:xfrm>
+            <a:off x="7802666" y="3790043"/>
+            <a:ext cx="4236357" cy="2917491"/>
+          </a:xfrm>
+          <a:prstGeom prst="rect">
+            <a:avLst/>
+          </a:prstGeom>
+        </p:spPr>
+      </p:pic>
+      <p:sp>
+        <p:nvSpPr>
+          <p:cNvPr id="5" name="TextBox 4">
+            <a:extLst>
+              <a:ext uri="{FF2B5EF4-FFF2-40B4-BE49-F238E27FC236}">
+                <a16:creationId xmlns:a16="http://schemas.microsoft.com/office/drawing/2014/main" id="{227301AD-8D93-E663-DB32-2F87A7E94DDF}"/>
+              </a:ext>
+            </a:extLst>
+          </p:cNvPr>
+          <p:cNvSpPr txBox="1"/>
+          <p:nvPr/>
+        </p:nvSpPr>
+        <p:spPr>
+          <a:xfrm>
+            <a:off x="0" y="-28283"/>
+            <a:ext cx="6629400" cy="523220"/>
+          </a:xfrm>
+          <a:prstGeom prst="rect">
+            <a:avLst/>
+          </a:prstGeom>
+          <a:noFill/>
+        </p:spPr>
+        <p:txBody>
+          <a:bodyPr wrap="square" rtlCol="0">
+            <a:spAutoFit/>
+          </a:bodyPr>
+          <a:lstStyle/>
+          <a:p>
+            <a:r>
+              <a:rPr lang="en-US" sz="2800" b="1" dirty="0"/>
+              <a:t>Fly Wheel Log Splitter = kinetic log splitter</a:t>
+            </a:r>
+          </a:p>
+        </p:txBody>
+      </p:sp>
+      <p:sp>
+        <p:nvSpPr>
+          <p:cNvPr id="6" name="TextBox 5">
+            <a:extLst>
+              <a:ext uri="{FF2B5EF4-FFF2-40B4-BE49-F238E27FC236}">
+                <a16:creationId xmlns:a16="http://schemas.microsoft.com/office/drawing/2014/main" id="{3B5B51E7-8203-F70E-17D1-849D54884FDD}"/>
+              </a:ext>
+            </a:extLst>
+          </p:cNvPr>
+          <p:cNvSpPr txBox="1"/>
+          <p:nvPr/>
+        </p:nvSpPr>
+        <p:spPr>
+          <a:xfrm>
+            <a:off x="0" y="547540"/>
+            <a:ext cx="4833257" cy="369332"/>
+          </a:xfrm>
+          <a:prstGeom prst="rect">
+            <a:avLst/>
+          </a:prstGeom>
+          <a:noFill/>
+        </p:spPr>
+        <p:txBody>
+          <a:bodyPr wrap="square" rtlCol="0">
+            <a:spAutoFit/>
+          </a:bodyPr>
+          <a:lstStyle/>
+          <a:p>
+            <a:r>
+              <a:rPr lang="en-US" dirty="0"/>
+              <a:t>Google for vintage fly  wheel log splitter</a:t>
+            </a:r>
+          </a:p>
+        </p:txBody>
+      </p:sp>
+      <p:pic>
+        <p:nvPicPr>
+          <p:cNvPr id="7" name="Picture 6">
+            <a:extLst>
+              <a:ext uri="{FF2B5EF4-FFF2-40B4-BE49-F238E27FC236}">
+                <a16:creationId xmlns:a16="http://schemas.microsoft.com/office/drawing/2014/main" id="{1E42DCBC-7FAA-EDA6-531C-AC35C5627119}"/>
+              </a:ext>
+            </a:extLst>
+          </p:cNvPr>
+          <p:cNvPicPr>
+            <a:picLocks noChangeAspect="1"/>
+          </p:cNvPicPr>
+          <p:nvPr/>
+        </p:nvPicPr>
+        <p:blipFill>
+          <a:blip r:embed="rId3" cstate="email">
+            <a:extLst>
+              <a:ext uri="{28A0092B-C50C-407E-A947-70E740481C1C}">
+                <a14:useLocalDpi xmlns:a14="http://schemas.microsoft.com/office/drawing/2010/main"/>
+              </a:ext>
+            </a:extLst>
+          </a:blip>
+          <a:stretch>
+            <a:fillRect/>
+          </a:stretch>
+        </p:blipFill>
+        <p:spPr>
+          <a:xfrm>
+            <a:off x="4673670" y="3913503"/>
+            <a:ext cx="3078773" cy="2794031"/>
+          </a:xfrm>
+          <a:prstGeom prst="rect">
+            <a:avLst/>
+          </a:prstGeom>
+        </p:spPr>
+      </p:pic>
+      <p:pic>
+        <p:nvPicPr>
+          <p:cNvPr id="8" name="Picture 7">
+            <a:extLst>
+              <a:ext uri="{FF2B5EF4-FFF2-40B4-BE49-F238E27FC236}">
+                <a16:creationId xmlns:a16="http://schemas.microsoft.com/office/drawing/2014/main" id="{65647C4A-87E4-7536-6B37-EFD8C065A3B1}"/>
+              </a:ext>
+            </a:extLst>
+          </p:cNvPr>
+          <p:cNvPicPr>
+            <a:picLocks noChangeAspect="1"/>
+          </p:cNvPicPr>
+          <p:nvPr/>
+        </p:nvPicPr>
+        <p:blipFill>
+          <a:blip r:embed="rId4" cstate="email">
+            <a:extLst>
+              <a:ext uri="{28A0092B-C50C-407E-A947-70E740481C1C}">
+                <a14:useLocalDpi xmlns:a14="http://schemas.microsoft.com/office/drawing/2010/main"/>
+              </a:ext>
+            </a:extLst>
+          </a:blip>
+          <a:stretch>
+            <a:fillRect/>
+          </a:stretch>
+        </p:blipFill>
+        <p:spPr>
+          <a:xfrm>
+            <a:off x="34472" y="1550437"/>
+            <a:ext cx="2641600" cy="2603500"/>
+          </a:xfrm>
+          <a:prstGeom prst="rect">
+            <a:avLst/>
+          </a:prstGeom>
+        </p:spPr>
+      </p:pic>
+      <p:pic>
+        <p:nvPicPr>
+          <p:cNvPr id="9" name="Picture 8">
+            <a:extLst>
+              <a:ext uri="{FF2B5EF4-FFF2-40B4-BE49-F238E27FC236}">
+                <a16:creationId xmlns:a16="http://schemas.microsoft.com/office/drawing/2014/main" id="{9A252C3A-2379-4C2E-EB9A-65C938F8604A}"/>
+              </a:ext>
+            </a:extLst>
+          </p:cNvPr>
+          <p:cNvPicPr>
+            <a:picLocks noChangeAspect="1"/>
+          </p:cNvPicPr>
+          <p:nvPr/>
+        </p:nvPicPr>
+        <p:blipFill>
+          <a:blip r:embed="rId5" cstate="email">
+            <a:extLst>
+              <a:ext uri="{28A0092B-C50C-407E-A947-70E740481C1C}">
+                <a14:useLocalDpi xmlns:a14="http://schemas.microsoft.com/office/drawing/2010/main"/>
+              </a:ext>
+            </a:extLst>
+          </a:blip>
+          <a:stretch>
+            <a:fillRect/>
+          </a:stretch>
+        </p:blipFill>
+        <p:spPr>
+          <a:xfrm rot="10800000">
+            <a:off x="3599342" y="2244272"/>
+            <a:ext cx="1663700" cy="1066800"/>
+          </a:xfrm>
+          <a:prstGeom prst="rect">
+            <a:avLst/>
+          </a:prstGeom>
+        </p:spPr>
+      </p:pic>
+      <p:sp>
+        <p:nvSpPr>
+          <p:cNvPr id="10" name="TextBox 9">
+            <a:extLst>
+              <a:ext uri="{FF2B5EF4-FFF2-40B4-BE49-F238E27FC236}">
+                <a16:creationId xmlns:a16="http://schemas.microsoft.com/office/drawing/2014/main" id="{62DDD14D-D18A-5F98-9870-1140EC295A2D}"/>
+              </a:ext>
+            </a:extLst>
+          </p:cNvPr>
+          <p:cNvSpPr txBox="1"/>
+          <p:nvPr/>
+        </p:nvSpPr>
+        <p:spPr>
+          <a:xfrm>
+            <a:off x="3471485" y="3378330"/>
+            <a:ext cx="1746955" cy="307777"/>
+          </a:xfrm>
+          <a:prstGeom prst="rect">
+            <a:avLst/>
+          </a:prstGeom>
+          <a:noFill/>
+        </p:spPr>
+        <p:txBody>
+          <a:bodyPr wrap="square" rtlCol="0">
+            <a:spAutoFit/>
+          </a:bodyPr>
+          <a:lstStyle/>
+          <a:p>
+            <a:r>
+              <a:rPr lang="en-US" sz="1400" dirty="0"/>
+              <a:t>rack and pinion gear</a:t>
+            </a:r>
+          </a:p>
+        </p:txBody>
+      </p:sp>
+      <p:sp>
+        <p:nvSpPr>
+          <p:cNvPr id="11" name="TextBox 10">
+            <a:extLst>
+              <a:ext uri="{FF2B5EF4-FFF2-40B4-BE49-F238E27FC236}">
+                <a16:creationId xmlns:a16="http://schemas.microsoft.com/office/drawing/2014/main" id="{299C1E2A-1ABA-6F8C-1683-D5FF623C4CC3}"/>
+              </a:ext>
+            </a:extLst>
+          </p:cNvPr>
+          <p:cNvSpPr txBox="1"/>
+          <p:nvPr/>
+        </p:nvSpPr>
+        <p:spPr>
+          <a:xfrm>
+            <a:off x="254908" y="4299919"/>
+            <a:ext cx="4368539" cy="1600438"/>
+          </a:xfrm>
+          <a:prstGeom prst="rect">
+            <a:avLst/>
+          </a:prstGeom>
+          <a:noFill/>
+        </p:spPr>
+        <p:txBody>
+          <a:bodyPr wrap="square" rtlCol="0">
+            <a:spAutoFit/>
+          </a:bodyPr>
+          <a:lstStyle/>
+          <a:p>
+            <a:pPr marL="285750" indent="-285750">
+              <a:buFont typeface="Arial" panose="020B0604020202020204" pitchFamily="34" charset="0"/>
+              <a:buChar char="•"/>
+            </a:pPr>
+            <a:r>
+              <a:rPr lang="en-US" sz="1400" dirty="0"/>
+              <a:t>Motor (gas or electric) rotates massive flywheel(s)</a:t>
+            </a:r>
+          </a:p>
+          <a:p>
+            <a:pPr marL="285750" indent="-285750">
+              <a:buFont typeface="Arial" panose="020B0604020202020204" pitchFamily="34" charset="0"/>
+              <a:buChar char="•"/>
+            </a:pPr>
+            <a:r>
+              <a:rPr lang="en-US" sz="1400" dirty="0"/>
+              <a:t>The shaft (axle) of this wheel has a (pinion) gear</a:t>
+            </a:r>
+          </a:p>
+          <a:p>
+            <a:pPr marL="285750" indent="-285750">
+              <a:buFont typeface="Arial" panose="020B0604020202020204" pitchFamily="34" charset="0"/>
+              <a:buChar char="•"/>
+            </a:pPr>
+            <a:r>
+              <a:rPr lang="en-US" sz="1400" dirty="0"/>
+              <a:t>A moveable rack also has gear.</a:t>
+            </a:r>
+          </a:p>
+          <a:p>
+            <a:pPr marL="285750" indent="-285750">
+              <a:buFont typeface="Arial" panose="020B0604020202020204" pitchFamily="34" charset="0"/>
+              <a:buChar char="•"/>
+            </a:pPr>
+            <a:r>
+              <a:rPr lang="en-US" sz="1400" dirty="0"/>
+              <a:t>It is pressed to the shaft gear using a cam lock</a:t>
+            </a:r>
+          </a:p>
+          <a:p>
+            <a:pPr marL="285750" indent="-285750">
+              <a:buFont typeface="Arial" panose="020B0604020202020204" pitchFamily="34" charset="0"/>
+              <a:buChar char="•"/>
+            </a:pPr>
+            <a:r>
+              <a:rPr lang="en-US" sz="1400" dirty="0"/>
+              <a:t>The rotating gear pushes the rack in a short burst, </a:t>
+            </a:r>
+            <a:br>
+              <a:rPr lang="en-US" sz="1400" dirty="0"/>
+            </a:br>
+            <a:r>
+              <a:rPr lang="en-US" sz="1400" dirty="0"/>
+              <a:t>then </a:t>
+            </a:r>
+            <a:r>
+              <a:rPr lang="en-US" sz="1400" dirty="0" err="1"/>
+              <a:t>disenges</a:t>
+            </a:r>
+            <a:r>
+              <a:rPr lang="en-US" sz="1400" dirty="0"/>
+              <a:t> </a:t>
+            </a:r>
+          </a:p>
+          <a:p>
+            <a:pPr marL="285750" indent="-285750">
+              <a:buFont typeface="Arial" panose="020B0604020202020204" pitchFamily="34" charset="0"/>
+              <a:buChar char="•"/>
+            </a:pPr>
+            <a:r>
+              <a:rPr lang="en-US" sz="1400" dirty="0"/>
+              <a:t>Several burst may be needed to split the wood</a:t>
+            </a:r>
+          </a:p>
+        </p:txBody>
+      </p:sp>
+      <p:pic>
+        <p:nvPicPr>
+          <p:cNvPr id="1026" name="Picture 2" descr="Flywheel Wood Splitter Plans">
+            <a:extLst>
+              <a:ext uri="{FF2B5EF4-FFF2-40B4-BE49-F238E27FC236}">
+                <a16:creationId xmlns:a16="http://schemas.microsoft.com/office/drawing/2014/main" id="{46FE64C1-2E01-1338-6489-854BD872E2A4}"/>
+              </a:ext>
+            </a:extLst>
+          </p:cNvPr>
+          <p:cNvPicPr>
+            <a:picLocks noChangeAspect="1" noChangeArrowheads="1"/>
+          </p:cNvPicPr>
+          <p:nvPr/>
+        </p:nvPicPr>
+        <p:blipFill>
+          <a:blip r:embed="rId6">
+            <a:extLst>
+              <a:ext uri="{28A0092B-C50C-407E-A947-70E740481C1C}">
+                <a14:useLocalDpi xmlns:a14="http://schemas.microsoft.com/office/drawing/2010/main"/>
+              </a:ext>
+            </a:extLst>
+          </a:blip>
+          <a:srcRect/>
+          <a:stretch>
+            <a:fillRect/>
+          </a:stretch>
+        </p:blipFill>
+        <p:spPr bwMode="auto">
+          <a:xfrm>
+            <a:off x="6357257" y="233327"/>
+            <a:ext cx="5777996" cy="3680176"/>
+          </a:xfrm>
+          <a:prstGeom prst="rect">
+            <a:avLst/>
+          </a:prstGeom>
+          <a:noFill/>
+          <a:extLst>
+            <a:ext uri="{909E8E84-426E-40DD-AFC4-6F175D3DCCD1}">
+              <a14:hiddenFill xmlns:a14="http://schemas.microsoft.com/office/drawing/2010/main">
+                <a:solidFill>
+                  <a:srgbClr val="FFFFFF"/>
+                </a:solidFill>
+              </a14:hiddenFill>
+            </a:ext>
+          </a:extLst>
+        </p:spPr>
+      </p:pic>
+    </p:spTree>
+    <p:extLst>
+      <p:ext uri="{BB962C8B-B14F-4D97-AF65-F5344CB8AC3E}">
+        <p14:creationId xmlns:p14="http://schemas.microsoft.com/office/powerpoint/2010/main" val="2875983173"/>
+      </p:ext>
+    </p:extLst>
+  </p:cSld>
+  <p:clrMapOvr>
+    <a:masterClrMapping/>
+  </p:clrMapOvr>
+</p:sld>
+</file>
+
 <file path=ppt/theme/theme1.xml><?xml version="1.0" encoding="utf-8"?>
 <a:theme xmlns:a="http://schemas.openxmlformats.org/drawingml/2006/main" name="Office Theme">
   <a:themeElements>

--- a/wood_log_splitter.pptx
+++ b/wood_log_splitter.pptx
@@ -7,7 +7,8 @@
   <p:sldIdLst>
     <p:sldId id="261" r:id="rId2"/>
     <p:sldId id="262" r:id="rId3"/>
-    <p:sldId id="263" r:id="rId4"/>
+    <p:sldId id="267" r:id="rId4"/>
+    <p:sldId id="263" r:id="rId5"/>
   </p:sldIdLst>
   <p:sldSz cx="12192000" cy="6858000"/>
   <p:notesSz cx="6858000" cy="9144000"/>
@@ -260,7 +261,7 @@
           <a:lstStyle/>
           <a:p>
             <a:fld id="{5F491023-0B0A-7041-9F06-D25A50EF063B}" type="datetimeFigureOut">
-              <a:t>11/26/22</a:t>
+              <a:t>12/5/22</a:t>
             </a:fld>
             <a:endParaRPr lang="en-US"/>
           </a:p>
@@ -456,7 +457,7 @@
           <a:lstStyle/>
           <a:p>
             <a:fld id="{5F491023-0B0A-7041-9F06-D25A50EF063B}" type="datetimeFigureOut">
-              <a:t>11/26/22</a:t>
+              <a:t>12/5/22</a:t>
             </a:fld>
             <a:endParaRPr lang="en-US"/>
           </a:p>
@@ -662,7 +663,7 @@
           <a:lstStyle/>
           <a:p>
             <a:fld id="{5F491023-0B0A-7041-9F06-D25A50EF063B}" type="datetimeFigureOut">
-              <a:t>11/26/22</a:t>
+              <a:t>12/5/22</a:t>
             </a:fld>
             <a:endParaRPr lang="en-US"/>
           </a:p>
@@ -858,7 +859,7 @@
           <a:lstStyle/>
           <a:p>
             <a:fld id="{5F491023-0B0A-7041-9F06-D25A50EF063B}" type="datetimeFigureOut">
-              <a:t>11/26/22</a:t>
+              <a:t>12/5/22</a:t>
             </a:fld>
             <a:endParaRPr lang="en-US"/>
           </a:p>
@@ -1131,7 +1132,7 @@
           <a:lstStyle/>
           <a:p>
             <a:fld id="{5F491023-0B0A-7041-9F06-D25A50EF063B}" type="datetimeFigureOut">
-              <a:t>11/26/22</a:t>
+              <a:t>12/5/22</a:t>
             </a:fld>
             <a:endParaRPr lang="en-US"/>
           </a:p>
@@ -1394,7 +1395,7 @@
           <a:lstStyle/>
           <a:p>
             <a:fld id="{5F491023-0B0A-7041-9F06-D25A50EF063B}" type="datetimeFigureOut">
-              <a:t>11/26/22</a:t>
+              <a:t>12/5/22</a:t>
             </a:fld>
             <a:endParaRPr lang="en-US"/>
           </a:p>
@@ -1804,7 +1805,7 @@
           <a:lstStyle/>
           <a:p>
             <a:fld id="{5F491023-0B0A-7041-9F06-D25A50EF063B}" type="datetimeFigureOut">
-              <a:t>11/26/22</a:t>
+              <a:t>12/5/22</a:t>
             </a:fld>
             <a:endParaRPr lang="en-US"/>
           </a:p>
@@ -1943,7 +1944,7 @@
           <a:lstStyle/>
           <a:p>
             <a:fld id="{5F491023-0B0A-7041-9F06-D25A50EF063B}" type="datetimeFigureOut">
-              <a:t>11/26/22</a:t>
+              <a:t>12/5/22</a:t>
             </a:fld>
             <a:endParaRPr lang="en-US"/>
           </a:p>
@@ -2054,7 +2055,7 @@
           <a:lstStyle/>
           <a:p>
             <a:fld id="{5F491023-0B0A-7041-9F06-D25A50EF063B}" type="datetimeFigureOut">
-              <a:t>11/26/22</a:t>
+              <a:t>12/5/22</a:t>
             </a:fld>
             <a:endParaRPr lang="en-US"/>
           </a:p>
@@ -2363,7 +2364,7 @@
           <a:lstStyle/>
           <a:p>
             <a:fld id="{5F491023-0B0A-7041-9F06-D25A50EF063B}" type="datetimeFigureOut">
-              <a:t>11/26/22</a:t>
+              <a:t>12/5/22</a:t>
             </a:fld>
             <a:endParaRPr lang="en-US"/>
           </a:p>
@@ -2649,7 +2650,7 @@
           <a:lstStyle/>
           <a:p>
             <a:fld id="{5F491023-0B0A-7041-9F06-D25A50EF063B}" type="datetimeFigureOut">
-              <a:t>11/26/22</a:t>
+              <a:t>12/5/22</a:t>
             </a:fld>
             <a:endParaRPr lang="en-US"/>
           </a:p>
@@ -2888,7 +2889,7 @@
           </a:lstStyle>
           <a:p>
             <a:fld id="{5F491023-0B0A-7041-9F06-D25A50EF063B}" type="datetimeFigureOut">
-              <a:t>11/26/22</a:t>
+              <a:t>12/5/22</a:t>
             </a:fld>
             <a:endParaRPr lang="en-US"/>
           </a:p>
@@ -3918,7 +3919,7 @@
         </p:nvSpPr>
         <p:spPr>
           <a:xfrm>
-            <a:off x="220336" y="1564395"/>
+            <a:off x="6958593" y="741593"/>
             <a:ext cx="4362679" cy="523220"/>
           </a:xfrm>
           <a:prstGeom prst="rect">
@@ -3988,9 +3989,121 @@
           <a:lstStyle/>
           <a:p>
             <a:r>
-              <a:rPr lang="en-US" sz="2800" b="1"/>
-              <a:t>Maunual Firewood Splitter</a:t>
-            </a:r>
+              <a:rPr lang="en-US" sz="2800" b="1" dirty="0" err="1"/>
+              <a:t>Maunual</a:t>
+            </a:r>
+            <a:r>
+              <a:rPr lang="en-US" sz="2800" b="1" dirty="0"/>
+              <a:t> Firewood Splitter</a:t>
+            </a:r>
+          </a:p>
+        </p:txBody>
+      </p:sp>
+      <p:pic>
+        <p:nvPicPr>
+          <p:cNvPr id="12" name="Picture 11">
+            <a:extLst>
+              <a:ext uri="{FF2B5EF4-FFF2-40B4-BE49-F238E27FC236}">
+                <a16:creationId xmlns:a16="http://schemas.microsoft.com/office/drawing/2014/main" id="{B91F8582-0B59-5EA2-9D1A-C7C3D0662FBC}"/>
+              </a:ext>
+            </a:extLst>
+          </p:cNvPr>
+          <p:cNvPicPr>
+            <a:picLocks noChangeAspect="1"/>
+          </p:cNvPicPr>
+          <p:nvPr/>
+        </p:nvPicPr>
+        <p:blipFill>
+          <a:blip r:embed="rId10" cstate="email">
+            <a:extLst>
+              <a:ext uri="{28A0092B-C50C-407E-A947-70E740481C1C}">
+                <a14:useLocalDpi xmlns:a14="http://schemas.microsoft.com/office/drawing/2010/main"/>
+              </a:ext>
+            </a:extLst>
+          </a:blip>
+          <a:stretch>
+            <a:fillRect/>
+          </a:stretch>
+        </p:blipFill>
+        <p:spPr>
+          <a:xfrm>
+            <a:off x="361263" y="1586208"/>
+            <a:ext cx="1759857" cy="2136365"/>
+          </a:xfrm>
+          <a:prstGeom prst="rect">
+            <a:avLst/>
+          </a:prstGeom>
+        </p:spPr>
+      </p:pic>
+      <p:sp>
+        <p:nvSpPr>
+          <p:cNvPr id="13" name="TextBox 12">
+            <a:extLst>
+              <a:ext uri="{FF2B5EF4-FFF2-40B4-BE49-F238E27FC236}">
+                <a16:creationId xmlns:a16="http://schemas.microsoft.com/office/drawing/2014/main" id="{3D9DEEA8-6FAE-6DC1-D6B0-79A4E137CF96}"/>
+              </a:ext>
+            </a:extLst>
+          </p:cNvPr>
+          <p:cNvSpPr txBox="1"/>
+          <p:nvPr/>
+        </p:nvSpPr>
+        <p:spPr>
+          <a:xfrm>
+            <a:off x="250371" y="3864429"/>
+            <a:ext cx="3603172" cy="738664"/>
+          </a:xfrm>
+          <a:prstGeom prst="rect">
+            <a:avLst/>
+          </a:prstGeom>
+          <a:noFill/>
+        </p:spPr>
+        <p:txBody>
+          <a:bodyPr wrap="square" rtlCol="0">
+            <a:spAutoFit/>
+          </a:bodyPr>
+          <a:lstStyle/>
+          <a:p>
+            <a:r>
+              <a:rPr lang="en-US" sz="1400" dirty="0"/>
+              <a:t>10 Ton Horizontal Log Splitter Wood Cutter Manual Hydraulic 2 Speed</a:t>
+            </a:r>
+          </a:p>
+          <a:p>
+            <a:r>
+              <a:rPr lang="en-US" sz="1400" dirty="0"/>
+              <a:t>.. </a:t>
+            </a:r>
+            <a:r>
+              <a:rPr lang="en-US" sz="1400" dirty="0">
+                <a:hlinkClick r:id="rId11"/>
+              </a:rPr>
+              <a:t>https://</a:t>
+            </a:r>
+            <a:r>
+              <a:rPr lang="en-US" sz="1400" dirty="0" err="1">
+                <a:hlinkClick r:id="rId11"/>
+              </a:rPr>
+              <a:t>www.amazon.com</a:t>
+            </a:r>
+            <a:r>
+              <a:rPr lang="en-US" sz="1400" dirty="0">
+                <a:hlinkClick r:id="rId11"/>
+              </a:rPr>
+              <a:t>/</a:t>
+            </a:r>
+            <a:r>
+              <a:rPr lang="en-US" sz="1400" dirty="0" err="1">
+                <a:hlinkClick r:id="rId11"/>
+              </a:rPr>
+              <a:t>dp</a:t>
+            </a:r>
+            <a:r>
+              <a:rPr lang="en-US" sz="1400" dirty="0">
+                <a:hlinkClick r:id="rId11"/>
+              </a:rPr>
+              <a:t>/B006ZBCB3M</a:t>
+            </a:r>
+            <a:endParaRPr lang="en-US" sz="1400" dirty="0"/>
           </a:p>
         </p:txBody>
       </p:sp>
@@ -4008,6 +4121,647 @@
 </file>
 
 <file path=ppt/slides/slide3.xml><?xml version="1.0" encoding="utf-8"?>
+<p:sld xmlns:a="http://schemas.openxmlformats.org/drawingml/2006/main" xmlns:r="http://schemas.openxmlformats.org/officeDocument/2006/relationships" xmlns:p="http://schemas.openxmlformats.org/presentationml/2006/main">
+  <p:cSld>
+    <p:spTree>
+      <p:nvGrpSpPr>
+        <p:cNvPr id="1" name=""/>
+        <p:cNvGrpSpPr/>
+        <p:nvPr/>
+      </p:nvGrpSpPr>
+      <p:grpSpPr>
+        <a:xfrm>
+          <a:off x="0" y="0"/>
+          <a:ext cx="0" cy="0"/>
+          <a:chOff x="0" y="0"/>
+          <a:chExt cx="0" cy="0"/>
+        </a:xfrm>
+      </p:grpSpPr>
+      <p:pic>
+        <p:nvPicPr>
+          <p:cNvPr id="1026" name="Picture 2" descr="Stikkan Softwood Kindling Splitter | PlowHearth">
+            <a:extLst>
+              <a:ext uri="{FF2B5EF4-FFF2-40B4-BE49-F238E27FC236}">
+                <a16:creationId xmlns:a16="http://schemas.microsoft.com/office/drawing/2014/main" id="{356777D3-3C66-0162-518D-204FE019CF4E}"/>
+              </a:ext>
+            </a:extLst>
+          </p:cNvPr>
+          <p:cNvPicPr>
+            <a:picLocks noChangeAspect="1" noChangeArrowheads="1"/>
+          </p:cNvPicPr>
+          <p:nvPr/>
+        </p:nvPicPr>
+        <p:blipFill>
+          <a:blip r:embed="rId2">
+            <a:extLst>
+              <a:ext uri="{28A0092B-C50C-407E-A947-70E740481C1C}">
+                <a14:useLocalDpi xmlns:a14="http://schemas.microsoft.com/office/drawing/2010/main"/>
+              </a:ext>
+            </a:extLst>
+          </a:blip>
+          <a:srcRect/>
+          <a:stretch>
+            <a:fillRect/>
+          </a:stretch>
+        </p:blipFill>
+        <p:spPr bwMode="auto">
+          <a:xfrm>
+            <a:off x="9383112" y="60860"/>
+            <a:ext cx="2717800" cy="2984500"/>
+          </a:xfrm>
+          <a:prstGeom prst="rect">
+            <a:avLst/>
+          </a:prstGeom>
+          <a:noFill/>
+          <a:extLst>
+            <a:ext uri="{909E8E84-426E-40DD-AFC4-6F175D3DCCD1}">
+              <a14:hiddenFill xmlns:a14="http://schemas.microsoft.com/office/drawing/2010/main">
+                <a:solidFill>
+                  <a:srgbClr val="FFFFFF"/>
+                </a:solidFill>
+              </a14:hiddenFill>
+            </a:ext>
+          </a:extLst>
+        </p:spPr>
+      </p:pic>
+      <p:sp>
+        <p:nvSpPr>
+          <p:cNvPr id="2" name="TextBox 1">
+            <a:extLst>
+              <a:ext uri="{FF2B5EF4-FFF2-40B4-BE49-F238E27FC236}">
+                <a16:creationId xmlns:a16="http://schemas.microsoft.com/office/drawing/2014/main" id="{922C2CA8-7878-50CC-3F77-55E584BF9241}"/>
+              </a:ext>
+            </a:extLst>
+          </p:cNvPr>
+          <p:cNvSpPr txBox="1"/>
+          <p:nvPr/>
+        </p:nvSpPr>
+        <p:spPr>
+          <a:xfrm>
+            <a:off x="9963252" y="3090992"/>
+            <a:ext cx="1761705" cy="523220"/>
+          </a:xfrm>
+          <a:prstGeom prst="rect">
+            <a:avLst/>
+          </a:prstGeom>
+          <a:noFill/>
+        </p:spPr>
+        <p:txBody>
+          <a:bodyPr wrap="square" rtlCol="0">
+            <a:spAutoFit/>
+          </a:bodyPr>
+          <a:lstStyle/>
+          <a:p>
+            <a:pPr algn="ctr"/>
+            <a:r>
+              <a:rPr lang="en-US" sz="1400"/>
+              <a:t>Stikkan Softwood Kindling Splitter</a:t>
+            </a:r>
+          </a:p>
+        </p:txBody>
+      </p:sp>
+      <p:pic>
+        <p:nvPicPr>
+          <p:cNvPr id="3" name="Picture 2">
+            <a:extLst>
+              <a:ext uri="{FF2B5EF4-FFF2-40B4-BE49-F238E27FC236}">
+                <a16:creationId xmlns:a16="http://schemas.microsoft.com/office/drawing/2014/main" id="{4F3A25EF-4BC3-CFA8-2831-3C553806D56F}"/>
+              </a:ext>
+            </a:extLst>
+          </p:cNvPr>
+          <p:cNvPicPr>
+            <a:picLocks noChangeAspect="1"/>
+          </p:cNvPicPr>
+          <p:nvPr/>
+        </p:nvPicPr>
+        <p:blipFill>
+          <a:blip r:embed="rId3" cstate="email">
+            <a:extLst>
+              <a:ext uri="{28A0092B-C50C-407E-A947-70E740481C1C}">
+                <a14:useLocalDpi xmlns:a14="http://schemas.microsoft.com/office/drawing/2010/main"/>
+              </a:ext>
+            </a:extLst>
+          </a:blip>
+          <a:stretch>
+            <a:fillRect/>
+          </a:stretch>
+        </p:blipFill>
+        <p:spPr>
+          <a:xfrm>
+            <a:off x="2571312" y="1375494"/>
+            <a:ext cx="1185880" cy="2154500"/>
+          </a:xfrm>
+          <a:prstGeom prst="rect">
+            <a:avLst/>
+          </a:prstGeom>
+        </p:spPr>
+      </p:pic>
+      <p:pic>
+        <p:nvPicPr>
+          <p:cNvPr id="4" name="Picture 3">
+            <a:extLst>
+              <a:ext uri="{FF2B5EF4-FFF2-40B4-BE49-F238E27FC236}">
+                <a16:creationId xmlns:a16="http://schemas.microsoft.com/office/drawing/2014/main" id="{1E6925B1-9D55-5F22-1AA6-8868593145D5}"/>
+              </a:ext>
+            </a:extLst>
+          </p:cNvPr>
+          <p:cNvPicPr>
+            <a:picLocks noChangeAspect="1"/>
+          </p:cNvPicPr>
+          <p:nvPr/>
+        </p:nvPicPr>
+        <p:blipFill>
+          <a:blip r:embed="rId4" cstate="email">
+            <a:extLst>
+              <a:ext uri="{28A0092B-C50C-407E-A947-70E740481C1C}">
+                <a14:useLocalDpi xmlns:a14="http://schemas.microsoft.com/office/drawing/2010/main"/>
+              </a:ext>
+            </a:extLst>
+          </a:blip>
+          <a:stretch>
+            <a:fillRect/>
+          </a:stretch>
+        </p:blipFill>
+        <p:spPr>
+          <a:xfrm>
+            <a:off x="1766370" y="4027105"/>
+            <a:ext cx="1609884" cy="2006034"/>
+          </a:xfrm>
+          <a:prstGeom prst="rect">
+            <a:avLst/>
+          </a:prstGeom>
+        </p:spPr>
+      </p:pic>
+      <p:pic>
+        <p:nvPicPr>
+          <p:cNvPr id="5" name="Picture 4">
+            <a:extLst>
+              <a:ext uri="{FF2B5EF4-FFF2-40B4-BE49-F238E27FC236}">
+                <a16:creationId xmlns:a16="http://schemas.microsoft.com/office/drawing/2014/main" id="{7603EDC7-2175-627F-4FFB-963CFC0235ED}"/>
+              </a:ext>
+            </a:extLst>
+          </p:cNvPr>
+          <p:cNvPicPr>
+            <a:picLocks noChangeAspect="1"/>
+          </p:cNvPicPr>
+          <p:nvPr/>
+        </p:nvPicPr>
+        <p:blipFill>
+          <a:blip r:embed="rId5" cstate="email">
+            <a:extLst>
+              <a:ext uri="{28A0092B-C50C-407E-A947-70E740481C1C}">
+                <a14:useLocalDpi xmlns:a14="http://schemas.microsoft.com/office/drawing/2010/main"/>
+              </a:ext>
+            </a:extLst>
+          </a:blip>
+          <a:stretch>
+            <a:fillRect/>
+          </a:stretch>
+        </p:blipFill>
+        <p:spPr>
+          <a:xfrm>
+            <a:off x="164600" y="1039007"/>
+            <a:ext cx="2286000" cy="2679700"/>
+          </a:xfrm>
+          <a:prstGeom prst="rect">
+            <a:avLst/>
+          </a:prstGeom>
+        </p:spPr>
+      </p:pic>
+      <p:pic>
+        <p:nvPicPr>
+          <p:cNvPr id="6" name="Picture 5">
+            <a:extLst>
+              <a:ext uri="{FF2B5EF4-FFF2-40B4-BE49-F238E27FC236}">
+                <a16:creationId xmlns:a16="http://schemas.microsoft.com/office/drawing/2014/main" id="{5D18BF97-99B6-72ED-B004-2617305970B5}"/>
+              </a:ext>
+            </a:extLst>
+          </p:cNvPr>
+          <p:cNvPicPr>
+            <a:picLocks noChangeAspect="1"/>
+          </p:cNvPicPr>
+          <p:nvPr/>
+        </p:nvPicPr>
+        <p:blipFill>
+          <a:blip r:embed="rId6" cstate="email">
+            <a:extLst>
+              <a:ext uri="{28A0092B-C50C-407E-A947-70E740481C1C}">
+                <a14:useLocalDpi xmlns:a14="http://schemas.microsoft.com/office/drawing/2010/main"/>
+              </a:ext>
+            </a:extLst>
+          </a:blip>
+          <a:stretch>
+            <a:fillRect/>
+          </a:stretch>
+        </p:blipFill>
+        <p:spPr>
+          <a:xfrm>
+            <a:off x="213551" y="3878639"/>
+            <a:ext cx="1470680" cy="2154500"/>
+          </a:xfrm>
+          <a:prstGeom prst="rect">
+            <a:avLst/>
+          </a:prstGeom>
+        </p:spPr>
+      </p:pic>
+      <p:sp>
+        <p:nvSpPr>
+          <p:cNvPr id="7" name="TextBox 6">
+            <a:extLst>
+              <a:ext uri="{FF2B5EF4-FFF2-40B4-BE49-F238E27FC236}">
+                <a16:creationId xmlns:a16="http://schemas.microsoft.com/office/drawing/2014/main" id="{F06190BB-65C8-092A-7E56-53ED3E165A08}"/>
+              </a:ext>
+            </a:extLst>
+          </p:cNvPr>
+          <p:cNvSpPr txBox="1"/>
+          <p:nvPr/>
+        </p:nvSpPr>
+        <p:spPr>
+          <a:xfrm>
+            <a:off x="7056370" y="3166310"/>
+            <a:ext cx="1761705" cy="523220"/>
+          </a:xfrm>
+          <a:prstGeom prst="rect">
+            <a:avLst/>
+          </a:prstGeom>
+          <a:noFill/>
+        </p:spPr>
+        <p:txBody>
+          <a:bodyPr wrap="square" rtlCol="0">
+            <a:spAutoFit/>
+          </a:bodyPr>
+          <a:lstStyle/>
+          <a:p>
+            <a:pPr algn="ctr"/>
+            <a:r>
+              <a:rPr lang="en-US" sz="1400"/>
+              <a:t>The Beaver Lever Kindling Cutter</a:t>
+            </a:r>
+          </a:p>
+        </p:txBody>
+      </p:sp>
+      <p:pic>
+        <p:nvPicPr>
+          <p:cNvPr id="8" name="Picture 7">
+            <a:extLst>
+              <a:ext uri="{FF2B5EF4-FFF2-40B4-BE49-F238E27FC236}">
+                <a16:creationId xmlns:a16="http://schemas.microsoft.com/office/drawing/2014/main" id="{FC460650-DA05-EE48-5546-D1F66D0C85A0}"/>
+              </a:ext>
+            </a:extLst>
+          </p:cNvPr>
+          <p:cNvPicPr>
+            <a:picLocks noChangeAspect="1"/>
+          </p:cNvPicPr>
+          <p:nvPr/>
+        </p:nvPicPr>
+        <p:blipFill>
+          <a:blip r:embed="rId7" cstate="email">
+            <a:extLst>
+              <a:ext uri="{28A0092B-C50C-407E-A947-70E740481C1C}">
+                <a14:useLocalDpi xmlns:a14="http://schemas.microsoft.com/office/drawing/2010/main"/>
+              </a:ext>
+            </a:extLst>
+          </a:blip>
+          <a:stretch>
+            <a:fillRect/>
+          </a:stretch>
+        </p:blipFill>
+        <p:spPr>
+          <a:xfrm>
+            <a:off x="6804008" y="60860"/>
+            <a:ext cx="2462543" cy="3078179"/>
+          </a:xfrm>
+          <a:prstGeom prst="rect">
+            <a:avLst/>
+          </a:prstGeom>
+        </p:spPr>
+      </p:pic>
+      <p:pic>
+        <p:nvPicPr>
+          <p:cNvPr id="9" name="Picture 8">
+            <a:extLst>
+              <a:ext uri="{FF2B5EF4-FFF2-40B4-BE49-F238E27FC236}">
+                <a16:creationId xmlns:a16="http://schemas.microsoft.com/office/drawing/2014/main" id="{E7E7E923-3D26-F24F-07F5-E197D1FF5510}"/>
+              </a:ext>
+            </a:extLst>
+          </p:cNvPr>
+          <p:cNvPicPr>
+            <a:picLocks noChangeAspect="1"/>
+          </p:cNvPicPr>
+          <p:nvPr/>
+        </p:nvPicPr>
+        <p:blipFill>
+          <a:blip r:embed="rId8" cstate="email">
+            <a:extLst>
+              <a:ext uri="{28A0092B-C50C-407E-A947-70E740481C1C}">
+                <a14:useLocalDpi xmlns:a14="http://schemas.microsoft.com/office/drawing/2010/main"/>
+              </a:ext>
+            </a:extLst>
+          </a:blip>
+          <a:stretch>
+            <a:fillRect/>
+          </a:stretch>
+        </p:blipFill>
+        <p:spPr>
+          <a:xfrm>
+            <a:off x="3754464" y="848507"/>
+            <a:ext cx="1612900" cy="3060700"/>
+          </a:xfrm>
+          <a:prstGeom prst="rect">
+            <a:avLst/>
+          </a:prstGeom>
+        </p:spPr>
+      </p:pic>
+      <p:sp>
+        <p:nvSpPr>
+          <p:cNvPr id="10" name="TextBox 9">
+            <a:extLst>
+              <a:ext uri="{FF2B5EF4-FFF2-40B4-BE49-F238E27FC236}">
+                <a16:creationId xmlns:a16="http://schemas.microsoft.com/office/drawing/2014/main" id="{0344CBB8-8D0B-64E2-97DE-CFBBB5F98E53}"/>
+              </a:ext>
+            </a:extLst>
+          </p:cNvPr>
+          <p:cNvSpPr txBox="1"/>
+          <p:nvPr/>
+        </p:nvSpPr>
+        <p:spPr>
+          <a:xfrm>
+            <a:off x="1348966" y="6265215"/>
+            <a:ext cx="2190939" cy="307777"/>
+          </a:xfrm>
+          <a:prstGeom prst="rect">
+            <a:avLst/>
+          </a:prstGeom>
+          <a:noFill/>
+        </p:spPr>
+        <p:txBody>
+          <a:bodyPr wrap="square" rtlCol="0">
+            <a:spAutoFit/>
+          </a:bodyPr>
+          <a:lstStyle/>
+          <a:p>
+            <a:r>
+              <a:rPr lang="en-US" sz="1400"/>
+              <a:t>Firewood Kindling Splitter</a:t>
+            </a:r>
+          </a:p>
+        </p:txBody>
+      </p:sp>
+      <p:pic>
+        <p:nvPicPr>
+          <p:cNvPr id="11" name="Picture 10">
+            <a:extLst>
+              <a:ext uri="{FF2B5EF4-FFF2-40B4-BE49-F238E27FC236}">
+                <a16:creationId xmlns:a16="http://schemas.microsoft.com/office/drawing/2014/main" id="{90C7DBCB-FE83-D249-63E3-F27C666865A2}"/>
+              </a:ext>
+            </a:extLst>
+          </p:cNvPr>
+          <p:cNvPicPr>
+            <a:picLocks noChangeAspect="1"/>
+          </p:cNvPicPr>
+          <p:nvPr/>
+        </p:nvPicPr>
+        <p:blipFill>
+          <a:blip r:embed="rId9" cstate="email">
+            <a:extLst>
+              <a:ext uri="{28A0092B-C50C-407E-A947-70E740481C1C}">
+                <a14:useLocalDpi xmlns:a14="http://schemas.microsoft.com/office/drawing/2010/main"/>
+              </a:ext>
+            </a:extLst>
+          </a:blip>
+          <a:stretch>
+            <a:fillRect/>
+          </a:stretch>
+        </p:blipFill>
+        <p:spPr>
+          <a:xfrm>
+            <a:off x="9009489" y="4139504"/>
+            <a:ext cx="1321806" cy="1109074"/>
+          </a:xfrm>
+          <a:prstGeom prst="rect">
+            <a:avLst/>
+          </a:prstGeom>
+        </p:spPr>
+      </p:pic>
+      <p:pic>
+        <p:nvPicPr>
+          <p:cNvPr id="12" name="Picture 11">
+            <a:extLst>
+              <a:ext uri="{FF2B5EF4-FFF2-40B4-BE49-F238E27FC236}">
+                <a16:creationId xmlns:a16="http://schemas.microsoft.com/office/drawing/2014/main" id="{4FA52DAF-AE6C-F230-9FCC-3463D43DD1F2}"/>
+              </a:ext>
+            </a:extLst>
+          </p:cNvPr>
+          <p:cNvPicPr>
+            <a:picLocks noChangeAspect="1"/>
+          </p:cNvPicPr>
+          <p:nvPr/>
+        </p:nvPicPr>
+        <p:blipFill>
+          <a:blip r:embed="rId10" cstate="email">
+            <a:extLst>
+              <a:ext uri="{28A0092B-C50C-407E-A947-70E740481C1C}">
+                <a14:useLocalDpi xmlns:a14="http://schemas.microsoft.com/office/drawing/2010/main"/>
+              </a:ext>
+            </a:extLst>
+          </a:blip>
+          <a:stretch>
+            <a:fillRect/>
+          </a:stretch>
+        </p:blipFill>
+        <p:spPr>
+          <a:xfrm>
+            <a:off x="10370176" y="4139504"/>
+            <a:ext cx="1761705" cy="1094285"/>
+          </a:xfrm>
+          <a:prstGeom prst="rect">
+            <a:avLst/>
+          </a:prstGeom>
+        </p:spPr>
+      </p:pic>
+      <p:sp>
+        <p:nvSpPr>
+          <p:cNvPr id="13" name="TextBox 12">
+            <a:extLst>
+              <a:ext uri="{FF2B5EF4-FFF2-40B4-BE49-F238E27FC236}">
+                <a16:creationId xmlns:a16="http://schemas.microsoft.com/office/drawing/2014/main" id="{3BC38013-34B2-1D6A-F592-38EAF1B61CAD}"/>
+              </a:ext>
+            </a:extLst>
+          </p:cNvPr>
+          <p:cNvSpPr txBox="1"/>
+          <p:nvPr/>
+        </p:nvSpPr>
+        <p:spPr>
+          <a:xfrm>
+            <a:off x="7346081" y="5611766"/>
+            <a:ext cx="4206141" cy="1015663"/>
+          </a:xfrm>
+          <a:prstGeom prst="rect">
+            <a:avLst/>
+          </a:prstGeom>
+          <a:noFill/>
+        </p:spPr>
+        <p:txBody>
+          <a:bodyPr wrap="square" rtlCol="0">
+            <a:spAutoFit/>
+          </a:bodyPr>
+          <a:lstStyle/>
+          <a:p>
+            <a:r>
+              <a:rPr lang="en-US" sz="1200" b="1" i="0">
+                <a:solidFill>
+                  <a:srgbClr val="030303"/>
+                </a:solidFill>
+                <a:effectLst/>
+                <a:latin typeface="YouTube Sans"/>
+              </a:rPr>
+              <a:t>Kindling Cracker Wood Splitter for Firewood</a:t>
+            </a:r>
+          </a:p>
+          <a:p>
+            <a:endParaRPr lang="en-US" sz="1200"/>
+          </a:p>
+          <a:p>
+            <a:r>
+              <a:rPr lang="en-US" sz="1200"/>
+              <a:t>https://www.youtube.com/watch?v=HGLJjR5frtc</a:t>
+            </a:r>
+          </a:p>
+          <a:p>
+            <a:r>
+              <a:rPr lang="en-US" sz="1200"/>
+              <a:t>https://www.youtube.com/watch?v=HGLJjR5frtc</a:t>
+            </a:r>
+          </a:p>
+          <a:p>
+            <a:r>
+              <a:rPr lang="en-US" sz="1200"/>
+              <a:t>https://www.youtube.com/watch?v=ZI6cwHRAu8U</a:t>
+            </a:r>
+          </a:p>
+        </p:txBody>
+      </p:sp>
+      <p:pic>
+        <p:nvPicPr>
+          <p:cNvPr id="14" name="Picture 13">
+            <a:extLst>
+              <a:ext uri="{FF2B5EF4-FFF2-40B4-BE49-F238E27FC236}">
+                <a16:creationId xmlns:a16="http://schemas.microsoft.com/office/drawing/2014/main" id="{86CAA34A-6135-5DAE-CF3D-9DF2ADBCAAEB}"/>
+              </a:ext>
+            </a:extLst>
+          </p:cNvPr>
+          <p:cNvPicPr>
+            <a:picLocks noChangeAspect="1"/>
+          </p:cNvPicPr>
+          <p:nvPr/>
+        </p:nvPicPr>
+        <p:blipFill>
+          <a:blip r:embed="rId11" cstate="email">
+            <a:extLst>
+              <a:ext uri="{28A0092B-C50C-407E-A947-70E740481C1C}">
+                <a14:useLocalDpi xmlns:a14="http://schemas.microsoft.com/office/drawing/2010/main"/>
+              </a:ext>
+            </a:extLst>
+          </a:blip>
+          <a:stretch>
+            <a:fillRect/>
+          </a:stretch>
+        </p:blipFill>
+        <p:spPr>
+          <a:xfrm>
+            <a:off x="6779668" y="4144911"/>
+            <a:ext cx="2190940" cy="1100581"/>
+          </a:xfrm>
+          <a:prstGeom prst="rect">
+            <a:avLst/>
+          </a:prstGeom>
+        </p:spPr>
+      </p:pic>
+      <p:pic>
+        <p:nvPicPr>
+          <p:cNvPr id="15" name="Picture 14">
+            <a:extLst>
+              <a:ext uri="{FF2B5EF4-FFF2-40B4-BE49-F238E27FC236}">
+                <a16:creationId xmlns:a16="http://schemas.microsoft.com/office/drawing/2014/main" id="{FB143E4F-C667-0B79-25D1-7CD0379BFC41}"/>
+              </a:ext>
+            </a:extLst>
+          </p:cNvPr>
+          <p:cNvPicPr>
+            <a:picLocks noChangeAspect="1"/>
+          </p:cNvPicPr>
+          <p:nvPr/>
+        </p:nvPicPr>
+        <p:blipFill>
+          <a:blip r:embed="rId12" cstate="email">
+            <a:extLst>
+              <a:ext uri="{28A0092B-C50C-407E-A947-70E740481C1C}">
+                <a14:useLocalDpi xmlns:a14="http://schemas.microsoft.com/office/drawing/2010/main"/>
+              </a:ext>
+            </a:extLst>
+          </a:blip>
+          <a:stretch>
+            <a:fillRect/>
+          </a:stretch>
+        </p:blipFill>
+        <p:spPr>
+          <a:xfrm>
+            <a:off x="5087645" y="4139504"/>
+            <a:ext cx="1601875" cy="1585749"/>
+          </a:xfrm>
+          <a:prstGeom prst="rect">
+            <a:avLst/>
+          </a:prstGeom>
+        </p:spPr>
+      </p:pic>
+      <p:sp>
+        <p:nvSpPr>
+          <p:cNvPr id="16" name="TextBox 15">
+            <a:extLst>
+              <a:ext uri="{FF2B5EF4-FFF2-40B4-BE49-F238E27FC236}">
+                <a16:creationId xmlns:a16="http://schemas.microsoft.com/office/drawing/2014/main" id="{4C024757-9E1C-B1F0-A808-3486E53F47CE}"/>
+              </a:ext>
+            </a:extLst>
+          </p:cNvPr>
+          <p:cNvSpPr txBox="1"/>
+          <p:nvPr/>
+        </p:nvSpPr>
+        <p:spPr>
+          <a:xfrm>
+            <a:off x="9054" y="18323"/>
+            <a:ext cx="4381878" cy="523220"/>
+          </a:xfrm>
+          <a:prstGeom prst="rect">
+            <a:avLst/>
+          </a:prstGeom>
+          <a:noFill/>
+        </p:spPr>
+        <p:txBody>
+          <a:bodyPr wrap="square" rtlCol="0">
+            <a:spAutoFit/>
+          </a:bodyPr>
+          <a:lstStyle/>
+          <a:p>
+            <a:r>
+              <a:rPr lang="en-US" sz="2800" b="1" dirty="0"/>
+              <a:t>Firewood Kindling Splitter</a:t>
+            </a:r>
+          </a:p>
+        </p:txBody>
+      </p:sp>
+    </p:spTree>
+    <p:extLst>
+      <p:ext uri="{BB962C8B-B14F-4D97-AF65-F5344CB8AC3E}">
+        <p14:creationId xmlns:p14="http://schemas.microsoft.com/office/powerpoint/2010/main" val="3592238132"/>
+      </p:ext>
+    </p:extLst>
+  </p:cSld>
+  <p:clrMapOvr>
+    <a:masterClrMapping/>
+  </p:clrMapOvr>
+</p:sld>
+</file>
+
+<file path=ppt/slides/slide4.xml><?xml version="1.0" encoding="utf-8"?>
 <p:sld xmlns:a="http://schemas.openxmlformats.org/drawingml/2006/main" xmlns:r="http://schemas.openxmlformats.org/officeDocument/2006/relationships" xmlns:p="http://schemas.openxmlformats.org/presentationml/2006/main">
   <p:cSld>
     <p:spTree>
